--- a/01-introducción-bienvenida.pptx
+++ b/01-introducción-bienvenida.pptx
@@ -5,10 +5,10 @@
     <p:sldMasterId id="2147483686" r:id="rId4"/>
   </p:sldMasterIdLst>
   <p:notesMasterIdLst>
-    <p:notesMasterId r:id="rId45"/>
+    <p:notesMasterId r:id="rId46"/>
   </p:notesMasterIdLst>
   <p:handoutMasterIdLst>
-    <p:handoutMasterId r:id="rId46"/>
+    <p:handoutMasterId r:id="rId47"/>
   </p:handoutMasterIdLst>
   <p:sldIdLst>
     <p:sldId id="300" r:id="rId5"/>
@@ -28,29 +28,30 @@
     <p:sldId id="345" r:id="rId19"/>
     <p:sldId id="346" r:id="rId20"/>
     <p:sldId id="347" r:id="rId21"/>
-    <p:sldId id="318" r:id="rId22"/>
-    <p:sldId id="319" r:id="rId23"/>
-    <p:sldId id="320" r:id="rId24"/>
-    <p:sldId id="327" r:id="rId25"/>
-    <p:sldId id="321" r:id="rId26"/>
-    <p:sldId id="329" r:id="rId27"/>
-    <p:sldId id="322" r:id="rId28"/>
-    <p:sldId id="324" r:id="rId29"/>
-    <p:sldId id="323" r:id="rId30"/>
-    <p:sldId id="325" r:id="rId31"/>
-    <p:sldId id="336" r:id="rId32"/>
-    <p:sldId id="339" r:id="rId33"/>
-    <p:sldId id="326" r:id="rId34"/>
-    <p:sldId id="328" r:id="rId35"/>
-    <p:sldId id="330" r:id="rId36"/>
-    <p:sldId id="331" r:id="rId37"/>
-    <p:sldId id="338" r:id="rId38"/>
-    <p:sldId id="340" r:id="rId39"/>
-    <p:sldId id="332" r:id="rId40"/>
-    <p:sldId id="334" r:id="rId41"/>
-    <p:sldId id="333" r:id="rId42"/>
-    <p:sldId id="337" r:id="rId43"/>
-    <p:sldId id="309" r:id="rId44"/>
+    <p:sldId id="348" r:id="rId22"/>
+    <p:sldId id="318" r:id="rId23"/>
+    <p:sldId id="319" r:id="rId24"/>
+    <p:sldId id="320" r:id="rId25"/>
+    <p:sldId id="327" r:id="rId26"/>
+    <p:sldId id="321" r:id="rId27"/>
+    <p:sldId id="329" r:id="rId28"/>
+    <p:sldId id="322" r:id="rId29"/>
+    <p:sldId id="324" r:id="rId30"/>
+    <p:sldId id="323" r:id="rId31"/>
+    <p:sldId id="325" r:id="rId32"/>
+    <p:sldId id="336" r:id="rId33"/>
+    <p:sldId id="339" r:id="rId34"/>
+    <p:sldId id="326" r:id="rId35"/>
+    <p:sldId id="328" r:id="rId36"/>
+    <p:sldId id="330" r:id="rId37"/>
+    <p:sldId id="331" r:id="rId38"/>
+    <p:sldId id="338" r:id="rId39"/>
+    <p:sldId id="340" r:id="rId40"/>
+    <p:sldId id="332" r:id="rId41"/>
+    <p:sldId id="334" r:id="rId42"/>
+    <p:sldId id="333" r:id="rId43"/>
+    <p:sldId id="337" r:id="rId44"/>
+    <p:sldId id="309" r:id="rId45"/>
   </p:sldIdLst>
   <p:sldSz cx="12192000" cy="6858000"/>
   <p:notesSz cx="6858000" cy="9144000"/>
@@ -173,6 +174,7 @@
 <p1510:revInfo xmlns:a="http://schemas.openxmlformats.org/drawingml/2006/main" xmlns:r="http://schemas.openxmlformats.org/officeDocument/2006/relationships" xmlns:p1510="http://schemas.microsoft.com/office/powerpoint/2015/10/main">
   <p1510:revLst>
     <p1510:client id="{6BB57C7F-C9F5-3072-E33E-A20DDD2EDEFD}" v="853" dt="2026-04-07T13:23:23.726"/>
+    <p1510:client id="{93722964-3877-FC51-EEDB-5586536ADF79}" v="45" dt="2026-04-07T13:57:36.556"/>
   </p1510:revLst>
 </p1510:revInfo>
 </file>
@@ -13013,6 +13015,194 @@
           <p:cNvPr id="3" name="Título 1">
             <a:extLst>
               <a:ext uri="{FF2B5EF4-FFF2-40B4-BE49-F238E27FC236}">
+                <a16:creationId xmlns:a16="http://schemas.microsoft.com/office/drawing/2014/main" id="{BF68373A-A735-FF97-8C70-390195E92D86}"/>
+              </a:ext>
+            </a:extLst>
+          </p:cNvPr>
+          <p:cNvSpPr txBox="1">
+            <a:spLocks/>
+          </p:cNvSpPr>
+          <p:nvPr/>
+        </p:nvSpPr>
+        <p:spPr>
+          <a:xfrm>
+            <a:off x="1368988" y="222068"/>
+            <a:ext cx="8080788" cy="1064480"/>
+          </a:xfrm>
+          <a:prstGeom prst="rect">
+            <a:avLst/>
+          </a:prstGeom>
+          <a:ln>
+            <a:noFill/>
+          </a:ln>
+        </p:spPr>
+        <p:txBody>
+          <a:bodyPr lIns="91440" tIns="45720" rIns="91440" bIns="45720" anchor="t"/>
+          <a:lstStyle>
+            <a:lvl1pPr algn="l" defTabSz="914400" rtl="0" eaLnBrk="1" latinLnBrk="0" hangingPunct="1">
+              <a:lnSpc>
+                <a:spcPct val="90000"/>
+              </a:lnSpc>
+              <a:spcBef>
+                <a:spcPct val="0"/>
+              </a:spcBef>
+              <a:buNone/>
+              <a:defRPr sz="4400" kern="1200">
+                <a:solidFill>
+                  <a:schemeClr val="tx1"/>
+                </a:solidFill>
+                <a:latin typeface="+mj-lt"/>
+                <a:ea typeface="+mj-ea"/>
+                <a:cs typeface="+mj-cs"/>
+              </a:defRPr>
+            </a:lvl1pPr>
+          </a:lstStyle>
+          <a:p>
+            <a:pPr>
+              <a:lnSpc>
+                <a:spcPts val="3800"/>
+              </a:lnSpc>
+            </a:pPr>
+            <a:r>
+              <a:rPr lang="es-CL" sz="4000" dirty="0">
+                <a:solidFill>
+                  <a:schemeClr val="bg1"/>
+                </a:solidFill>
+              </a:rPr>
+              <a:t>Enfoque del curso y contenidos</a:t>
+            </a:r>
+            <a:endParaRPr lang="es-ES" dirty="0">
+              <a:solidFill>
+                <a:schemeClr val="bg1"/>
+              </a:solidFill>
+            </a:endParaRPr>
+          </a:p>
+        </p:txBody>
+      </p:sp>
+      <p:sp>
+        <p:nvSpPr>
+          <p:cNvPr id="4" name="CuadroTexto 3">
+            <a:extLst>
+              <a:ext uri="{FF2B5EF4-FFF2-40B4-BE49-F238E27FC236}">
+                <a16:creationId xmlns:a16="http://schemas.microsoft.com/office/drawing/2014/main" id="{00430070-B021-9DE8-DB5D-0546F9E83C18}"/>
+              </a:ext>
+            </a:extLst>
+          </p:cNvPr>
+          <p:cNvSpPr txBox="1"/>
+          <p:nvPr/>
+        </p:nvSpPr>
+        <p:spPr>
+          <a:xfrm>
+            <a:off x="536222" y="4162778"/>
+            <a:ext cx="10724444" cy="1200329"/>
+          </a:xfrm>
+          <a:prstGeom prst="rect">
+            <a:avLst/>
+          </a:prstGeom>
+          <a:noFill/>
+        </p:spPr>
+        <p:txBody>
+          <a:bodyPr rot="0" spcFirstLastPara="0" vertOverflow="overflow" horzOverflow="overflow" vert="horz" wrap="square" lIns="91440" tIns="45720" rIns="91440" bIns="45720" numCol="1" spcCol="0" rtlCol="0" fromWordArt="0" anchor="t" anchorCtr="0" forceAA="0" compatLnSpc="1">
+            <a:prstTxWarp prst="textNoShape">
+              <a:avLst/>
+            </a:prstTxWarp>
+            <a:spAutoFit/>
+          </a:bodyPr>
+          <a:lstStyle/>
+          <a:p>
+            <a:r>
+              <a:rPr lang="en-US"/>
+              <a:t>https://forms.cloud.microsoft/Pages/DesignPageV2.aspx?prevorigin=shell&amp;origin=NeoPortalPage&amp;subpage=design&amp;id=CqqqW5Qfm0a7udFkXa1axVIs9kt6eBFKh_ZUKl_x7T5UQ1U4M1JRNzBMM05QTVg3M0NYWDhVS1oxQS4u&amp;analysis=true</a:t>
+            </a:r>
+          </a:p>
+          <a:p>
+            <a:pPr algn="ctr"/>
+            <a:endParaRPr lang="es-ES"/>
+          </a:p>
+        </p:txBody>
+      </p:sp>
+      <p:sp>
+        <p:nvSpPr>
+          <p:cNvPr id="5" name="CuadroTexto 4">
+            <a:extLst>
+              <a:ext uri="{FF2B5EF4-FFF2-40B4-BE49-F238E27FC236}">
+                <a16:creationId xmlns:a16="http://schemas.microsoft.com/office/drawing/2014/main" id="{83C5103F-1124-7EAF-FA32-E407C70984BA}"/>
+              </a:ext>
+            </a:extLst>
+          </p:cNvPr>
+          <p:cNvSpPr txBox="1"/>
+          <p:nvPr/>
+        </p:nvSpPr>
+        <p:spPr>
+          <a:xfrm>
+            <a:off x="827085" y="1990314"/>
+            <a:ext cx="7934953" cy="461665"/>
+          </a:xfrm>
+          <a:prstGeom prst="rect">
+            <a:avLst/>
+          </a:prstGeom>
+          <a:noFill/>
+        </p:spPr>
+        <p:txBody>
+          <a:bodyPr rot="0" spcFirstLastPara="0" vertOverflow="overflow" horzOverflow="overflow" vert="horz" wrap="square" lIns="91440" tIns="45720" rIns="91440" bIns="45720" numCol="1" spcCol="0" rtlCol="0" fromWordArt="0" anchor="t" anchorCtr="0" forceAA="0" compatLnSpc="1">
+            <a:prstTxWarp prst="textNoShape">
+              <a:avLst/>
+            </a:prstTxWarp>
+            <a:spAutoFit/>
+          </a:bodyPr>
+          <a:lstStyle/>
+          <a:p>
+            <a:r>
+              <a:rPr lang="es-ES" sz="2400" b="1" dirty="0"/>
+              <a:t>Revisemos los </a:t>
+            </a:r>
+            <a:r>
+              <a:rPr lang="es-ES" sz="2400" b="1" err="1"/>
+              <a:t>result</a:t>
+            </a:r>
+            <a:r>
+              <a:rPr lang="es-ES" sz="2400" b="1"/>
+              <a:t>ados de la encuesta</a:t>
+            </a:r>
+            <a:endParaRPr lang="es-ES" sz="2400" b="1" dirty="0"/>
+          </a:p>
+        </p:txBody>
+      </p:sp>
+    </p:spTree>
+    <p:extLst>
+      <p:ext uri="{BB962C8B-B14F-4D97-AF65-F5344CB8AC3E}">
+        <p14:creationId xmlns:p14="http://schemas.microsoft.com/office/powerpoint/2010/main" val="1239966321"/>
+      </p:ext>
+    </p:extLst>
+  </p:cSld>
+  <p:clrMapOvr>
+    <a:masterClrMapping/>
+  </p:clrMapOvr>
+</p:sld>
+</file>
+
+<file path=ppt/slides/slide19.xml><?xml version="1.0" encoding="utf-8"?>
+<p:sld xmlns:a="http://schemas.openxmlformats.org/drawingml/2006/main" xmlns:r="http://schemas.openxmlformats.org/officeDocument/2006/relationships" xmlns:p="http://schemas.openxmlformats.org/presentationml/2006/main">
+  <p:cSld>
+    <p:spTree>
+      <p:nvGrpSpPr>
+        <p:cNvPr id="1" name=""/>
+        <p:cNvGrpSpPr/>
+        <p:nvPr/>
+      </p:nvGrpSpPr>
+      <p:grpSpPr>
+        <a:xfrm>
+          <a:off x="0" y="0"/>
+          <a:ext cx="0" cy="0"/>
+          <a:chOff x="0" y="0"/>
+          <a:chExt cx="0" cy="0"/>
+        </a:xfrm>
+      </p:grpSpPr>
+      <p:sp>
+        <p:nvSpPr>
+          <p:cNvPr id="3" name="Título 1">
+            <a:extLst>
+              <a:ext uri="{FF2B5EF4-FFF2-40B4-BE49-F238E27FC236}">
                 <a16:creationId xmlns:a16="http://schemas.microsoft.com/office/drawing/2014/main" id="{45D01E42-3ABB-0C93-DF38-4BA3C8274B9A}"/>
               </a:ext>
             </a:extLst>
@@ -14165,7 +14355,67 @@
 </p:sld>
 </file>
 
-<file path=ppt/slides/slide19.xml><?xml version="1.0" encoding="utf-8"?>
+<file path=ppt/slides/slide2.xml><?xml version="1.0" encoding="utf-8"?>
+<p:sld xmlns:a="http://schemas.openxmlformats.org/drawingml/2006/main" xmlns:r="http://schemas.openxmlformats.org/officeDocument/2006/relationships" xmlns:p="http://schemas.openxmlformats.org/presentationml/2006/main">
+  <p:cSld>
+    <p:spTree>
+      <p:nvGrpSpPr>
+        <p:cNvPr id="1" name=""/>
+        <p:cNvGrpSpPr/>
+        <p:nvPr/>
+      </p:nvGrpSpPr>
+      <p:grpSpPr>
+        <a:xfrm>
+          <a:off x="0" y="0"/>
+          <a:ext cx="0" cy="0"/>
+          <a:chOff x="0" y="0"/>
+          <a:chExt cx="0" cy="0"/>
+        </a:xfrm>
+      </p:grpSpPr>
+      <p:pic>
+        <p:nvPicPr>
+          <p:cNvPr id="7" name="Imagen 6" descr="Imágenes de Bienvenidos idiomas - Descarga gratuita en Freepik">
+            <a:extLst>
+              <a:ext uri="{FF2B5EF4-FFF2-40B4-BE49-F238E27FC236}">
+                <a16:creationId xmlns:a16="http://schemas.microsoft.com/office/drawing/2014/main" id="{1D13E165-9660-08FC-AE4B-E69D7F9B2D76}"/>
+              </a:ext>
+            </a:extLst>
+          </p:cNvPr>
+          <p:cNvPicPr>
+            <a:picLocks noChangeAspect="1"/>
+          </p:cNvPicPr>
+          <p:nvPr/>
+        </p:nvPicPr>
+        <p:blipFill>
+          <a:blip r:embed="rId2"/>
+          <a:stretch>
+            <a:fillRect/>
+          </a:stretch>
+        </p:blipFill>
+        <p:spPr>
+          <a:xfrm>
+            <a:off x="2911804" y="1009785"/>
+            <a:ext cx="5647037" cy="5647037"/>
+          </a:xfrm>
+          <a:prstGeom prst="rect">
+            <a:avLst/>
+          </a:prstGeom>
+        </p:spPr>
+      </p:pic>
+    </p:spTree>
+    <p:extLst>
+      <p:ext uri="{BB962C8B-B14F-4D97-AF65-F5344CB8AC3E}">
+        <p14:creationId xmlns:p14="http://schemas.microsoft.com/office/powerpoint/2010/main" val="3180923425"/>
+      </p:ext>
+    </p:extLst>
+  </p:cSld>
+  <p:clrMapOvr>
+    <a:masterClrMapping/>
+  </p:clrMapOvr>
+</p:sld>
+</file>
+
+<file path=ppt/slides/slide20.xml><?xml version="1.0" encoding="utf-8"?>
 <p:sld xmlns:a="http://schemas.openxmlformats.org/drawingml/2006/main" xmlns:r="http://schemas.openxmlformats.org/officeDocument/2006/relationships" xmlns:p="http://schemas.openxmlformats.org/presentationml/2006/main">
   <p:cSld>
     <p:spTree>
@@ -14652,67 +14902,7 @@
 </p:sld>
 </file>
 
-<file path=ppt/slides/slide2.xml><?xml version="1.0" encoding="utf-8"?>
-<p:sld xmlns:a="http://schemas.openxmlformats.org/drawingml/2006/main" xmlns:r="http://schemas.openxmlformats.org/officeDocument/2006/relationships" xmlns:p="http://schemas.openxmlformats.org/presentationml/2006/main">
-  <p:cSld>
-    <p:spTree>
-      <p:nvGrpSpPr>
-        <p:cNvPr id="1" name=""/>
-        <p:cNvGrpSpPr/>
-        <p:nvPr/>
-      </p:nvGrpSpPr>
-      <p:grpSpPr>
-        <a:xfrm>
-          <a:off x="0" y="0"/>
-          <a:ext cx="0" cy="0"/>
-          <a:chOff x="0" y="0"/>
-          <a:chExt cx="0" cy="0"/>
-        </a:xfrm>
-      </p:grpSpPr>
-      <p:pic>
-        <p:nvPicPr>
-          <p:cNvPr id="7" name="Imagen 6" descr="Imágenes de Bienvenidos idiomas - Descarga gratuita en Freepik">
-            <a:extLst>
-              <a:ext uri="{FF2B5EF4-FFF2-40B4-BE49-F238E27FC236}">
-                <a16:creationId xmlns:a16="http://schemas.microsoft.com/office/drawing/2014/main" id="{1D13E165-9660-08FC-AE4B-E69D7F9B2D76}"/>
-              </a:ext>
-            </a:extLst>
-          </p:cNvPr>
-          <p:cNvPicPr>
-            <a:picLocks noChangeAspect="1"/>
-          </p:cNvPicPr>
-          <p:nvPr/>
-        </p:nvPicPr>
-        <p:blipFill>
-          <a:blip r:embed="rId2"/>
-          <a:stretch>
-            <a:fillRect/>
-          </a:stretch>
-        </p:blipFill>
-        <p:spPr>
-          <a:xfrm>
-            <a:off x="2911804" y="1009785"/>
-            <a:ext cx="5647037" cy="5647037"/>
-          </a:xfrm>
-          <a:prstGeom prst="rect">
-            <a:avLst/>
-          </a:prstGeom>
-        </p:spPr>
-      </p:pic>
-    </p:spTree>
-    <p:extLst>
-      <p:ext uri="{BB962C8B-B14F-4D97-AF65-F5344CB8AC3E}">
-        <p14:creationId xmlns:p14="http://schemas.microsoft.com/office/powerpoint/2010/main" val="3180923425"/>
-      </p:ext>
-    </p:extLst>
-  </p:cSld>
-  <p:clrMapOvr>
-    <a:masterClrMapping/>
-  </p:clrMapOvr>
-</p:sld>
-</file>
-
-<file path=ppt/slides/slide20.xml><?xml version="1.0" encoding="utf-8"?>
+<file path=ppt/slides/slide21.xml><?xml version="1.0" encoding="utf-8"?>
 <p:sld xmlns:a="http://schemas.openxmlformats.org/drawingml/2006/main" xmlns:r="http://schemas.openxmlformats.org/officeDocument/2006/relationships" xmlns:p="http://schemas.openxmlformats.org/presentationml/2006/main">
   <p:cSld>
     <p:spTree>
@@ -15450,7 +15640,7 @@
 </p:sld>
 </file>
 
-<file path=ppt/slides/slide21.xml><?xml version="1.0" encoding="utf-8"?>
+<file path=ppt/slides/slide22.xml><?xml version="1.0" encoding="utf-8"?>
 <p:sld xmlns:a="http://schemas.openxmlformats.org/drawingml/2006/main" xmlns:r="http://schemas.openxmlformats.org/officeDocument/2006/relationships" xmlns:p="http://schemas.openxmlformats.org/presentationml/2006/main">
   <p:cSld>
     <p:spTree>
@@ -16630,7 +16820,7 @@
 </p:sld>
 </file>
 
-<file path=ppt/slides/slide22.xml><?xml version="1.0" encoding="utf-8"?>
+<file path=ppt/slides/slide23.xml><?xml version="1.0" encoding="utf-8"?>
 <p:sld xmlns:a="http://schemas.openxmlformats.org/drawingml/2006/main" xmlns:r="http://schemas.openxmlformats.org/officeDocument/2006/relationships" xmlns:p="http://schemas.openxmlformats.org/presentationml/2006/main">
   <p:cSld>
     <p:spTree>
@@ -16847,7 +17037,7 @@
 </p:sld>
 </file>
 
-<file path=ppt/slides/slide23.xml><?xml version="1.0" encoding="utf-8"?>
+<file path=ppt/slides/slide24.xml><?xml version="1.0" encoding="utf-8"?>
 <p:sld xmlns:a="http://schemas.openxmlformats.org/drawingml/2006/main" xmlns:r="http://schemas.openxmlformats.org/officeDocument/2006/relationships" xmlns:p="http://schemas.openxmlformats.org/presentationml/2006/main">
   <p:cSld>
     <p:spTree>
@@ -17079,7 +17269,7 @@
 </p:sld>
 </file>
 
-<file path=ppt/slides/slide24.xml><?xml version="1.0" encoding="utf-8"?>
+<file path=ppt/slides/slide25.xml><?xml version="1.0" encoding="utf-8"?>
 <p:sld xmlns:a="http://schemas.openxmlformats.org/drawingml/2006/main" xmlns:r="http://schemas.openxmlformats.org/officeDocument/2006/relationships" xmlns:p="http://schemas.openxmlformats.org/presentationml/2006/main">
   <p:cSld>
     <p:spTree>
@@ -17204,7 +17394,7 @@
 </p:sld>
 </file>
 
-<file path=ppt/slides/slide25.xml><?xml version="1.0" encoding="utf-8"?>
+<file path=ppt/slides/slide26.xml><?xml version="1.0" encoding="utf-8"?>
 <p:sld xmlns:a="http://schemas.openxmlformats.org/drawingml/2006/main" xmlns:r="http://schemas.openxmlformats.org/officeDocument/2006/relationships" xmlns:p="http://schemas.openxmlformats.org/presentationml/2006/main">
   <p:cSld>
     <p:spTree>
@@ -18046,7 +18236,7 @@
 </p:sld>
 </file>
 
-<file path=ppt/slides/slide26.xml><?xml version="1.0" encoding="utf-8"?>
+<file path=ppt/slides/slide27.xml><?xml version="1.0" encoding="utf-8"?>
 <p:sld xmlns:a="http://schemas.openxmlformats.org/drawingml/2006/main" xmlns:r="http://schemas.openxmlformats.org/officeDocument/2006/relationships" xmlns:p="http://schemas.openxmlformats.org/presentationml/2006/main">
   <p:cSld>
     <p:spTree>
@@ -18273,269 +18463,6 @@
     <p:extLst>
       <p:ext uri="{BB962C8B-B14F-4D97-AF65-F5344CB8AC3E}">
         <p14:creationId xmlns:p14="http://schemas.microsoft.com/office/powerpoint/2010/main" val="1295004017"/>
-      </p:ext>
-    </p:extLst>
-  </p:cSld>
-  <p:clrMapOvr>
-    <a:masterClrMapping/>
-  </p:clrMapOvr>
-</p:sld>
-</file>
-
-<file path=ppt/slides/slide27.xml><?xml version="1.0" encoding="utf-8"?>
-<p:sld xmlns:a="http://schemas.openxmlformats.org/drawingml/2006/main" xmlns:r="http://schemas.openxmlformats.org/officeDocument/2006/relationships" xmlns:p="http://schemas.openxmlformats.org/presentationml/2006/main">
-  <p:cSld>
-    <p:spTree>
-      <p:nvGrpSpPr>
-        <p:cNvPr id="1" name=""/>
-        <p:cNvGrpSpPr/>
-        <p:nvPr/>
-      </p:nvGrpSpPr>
-      <p:grpSpPr>
-        <a:xfrm>
-          <a:off x="0" y="0"/>
-          <a:ext cx="0" cy="0"/>
-          <a:chOff x="0" y="0"/>
-          <a:chExt cx="0" cy="0"/>
-        </a:xfrm>
-      </p:grpSpPr>
-      <p:sp>
-        <p:nvSpPr>
-          <p:cNvPr id="2" name="Título 1">
-            <a:extLst>
-              <a:ext uri="{FF2B5EF4-FFF2-40B4-BE49-F238E27FC236}">
-                <a16:creationId xmlns:a16="http://schemas.microsoft.com/office/drawing/2014/main" id="{00E9BF25-01FB-48C6-410C-D8C32DF9C761}"/>
-              </a:ext>
-            </a:extLst>
-          </p:cNvPr>
-          <p:cNvSpPr txBox="1">
-            <a:spLocks/>
-          </p:cNvSpPr>
-          <p:nvPr/>
-        </p:nvSpPr>
-        <p:spPr>
-          <a:xfrm>
-            <a:off x="1266016" y="211771"/>
-            <a:ext cx="8080788" cy="1064480"/>
-          </a:xfrm>
-          <a:prstGeom prst="rect">
-            <a:avLst/>
-          </a:prstGeom>
-          <a:ln>
-            <a:noFill/>
-          </a:ln>
-        </p:spPr>
-        <p:txBody>
-          <a:bodyPr lIns="91440" tIns="45720" rIns="91440" bIns="45720" anchor="t"/>
-          <a:lstStyle>
-            <a:lvl1pPr algn="l" defTabSz="914400" rtl="0" eaLnBrk="1" latinLnBrk="0" hangingPunct="1">
-              <a:lnSpc>
-                <a:spcPct val="90000"/>
-              </a:lnSpc>
-              <a:spcBef>
-                <a:spcPct val="0"/>
-              </a:spcBef>
-              <a:buNone/>
-              <a:defRPr sz="4400" kern="1200">
-                <a:solidFill>
-                  <a:schemeClr val="tx1"/>
-                </a:solidFill>
-                <a:latin typeface="+mj-lt"/>
-                <a:ea typeface="+mj-ea"/>
-                <a:cs typeface="+mj-cs"/>
-              </a:defRPr>
-            </a:lvl1pPr>
-          </a:lstStyle>
-          <a:p>
-            <a:pPr>
-              <a:lnSpc>
-                <a:spcPts val="3800"/>
-              </a:lnSpc>
-            </a:pPr>
-            <a:r>
-              <a:rPr lang="es-CL" sz="4000" dirty="0">
-                <a:solidFill>
-                  <a:schemeClr val="bg1"/>
-                </a:solidFill>
-              </a:rPr>
-              <a:t>Una breve historia</a:t>
-            </a:r>
-            <a:endParaRPr lang="es-ES" dirty="0"/>
-          </a:p>
-        </p:txBody>
-      </p:sp>
-      <p:pic>
-        <p:nvPicPr>
-          <p:cNvPr id="8" name="Imagen 7" descr="Interfaz de usuario gráfica, Aplicación&#10;&#10;El contenido generado por IA puede ser incorrecto.">
-            <a:extLst>
-              <a:ext uri="{FF2B5EF4-FFF2-40B4-BE49-F238E27FC236}">
-                <a16:creationId xmlns:a16="http://schemas.microsoft.com/office/drawing/2014/main" id="{EF0E0987-5EBF-664B-6078-6C27B1A3B3F1}"/>
-              </a:ext>
-            </a:extLst>
-          </p:cNvPr>
-          <p:cNvPicPr>
-            <a:picLocks noChangeAspect="1"/>
-          </p:cNvPicPr>
-          <p:nvPr/>
-        </p:nvPicPr>
-        <p:blipFill>
-          <a:blip r:embed="rId2"/>
-          <a:stretch>
-            <a:fillRect/>
-          </a:stretch>
-        </p:blipFill>
-        <p:spPr>
-          <a:xfrm>
-            <a:off x="431887" y="1856014"/>
-            <a:ext cx="6234494" cy="2362200"/>
-          </a:xfrm>
-          <a:prstGeom prst="rect">
-            <a:avLst/>
-          </a:prstGeom>
-        </p:spPr>
-      </p:pic>
-      <p:pic>
-        <p:nvPicPr>
-          <p:cNvPr id="10" name="Imagen 9" descr="Gráfico&#10;&#10;El contenido generado por IA puede ser incorrecto.">
-            <a:extLst>
-              <a:ext uri="{FF2B5EF4-FFF2-40B4-BE49-F238E27FC236}">
-                <a16:creationId xmlns:a16="http://schemas.microsoft.com/office/drawing/2014/main" id="{29167178-6C40-B4FF-E0D0-2D35424F525D}"/>
-              </a:ext>
-            </a:extLst>
-          </p:cNvPr>
-          <p:cNvPicPr>
-            <a:picLocks noChangeAspect="1"/>
-          </p:cNvPicPr>
-          <p:nvPr/>
-        </p:nvPicPr>
-        <p:blipFill>
-          <a:blip r:embed="rId3"/>
-          <a:stretch>
-            <a:fillRect/>
-          </a:stretch>
-        </p:blipFill>
-        <p:spPr>
-          <a:xfrm>
-            <a:off x="8562706" y="2055196"/>
-            <a:ext cx="1714500" cy="1466850"/>
-          </a:xfrm>
-          <a:prstGeom prst="rect">
-            <a:avLst/>
-          </a:prstGeom>
-        </p:spPr>
-      </p:pic>
-      <p:pic>
-        <p:nvPicPr>
-          <p:cNvPr id="12" name="Imagen 11">
-            <a:extLst>
-              <a:ext uri="{FF2B5EF4-FFF2-40B4-BE49-F238E27FC236}">
-                <a16:creationId xmlns:a16="http://schemas.microsoft.com/office/drawing/2014/main" id="{7C3BE486-B8A4-2506-22ED-129564C31317}"/>
-              </a:ext>
-            </a:extLst>
-          </p:cNvPr>
-          <p:cNvPicPr>
-            <a:picLocks noChangeAspect="1"/>
-          </p:cNvPicPr>
-          <p:nvPr/>
-        </p:nvPicPr>
-        <p:blipFill>
-          <a:blip r:embed="rId4"/>
-          <a:stretch>
-            <a:fillRect/>
-          </a:stretch>
-        </p:blipFill>
-        <p:spPr>
-          <a:xfrm>
-            <a:off x="8353156" y="3999957"/>
-            <a:ext cx="1924050" cy="428625"/>
-          </a:xfrm>
-          <a:prstGeom prst="rect">
-            <a:avLst/>
-          </a:prstGeom>
-        </p:spPr>
-      </p:pic>
-      <p:pic>
-        <p:nvPicPr>
-          <p:cNvPr id="14" name="Imagen 13" descr="Texto&#10;&#10;El contenido generado por IA puede ser incorrecto.">
-            <a:extLst>
-              <a:ext uri="{FF2B5EF4-FFF2-40B4-BE49-F238E27FC236}">
-                <a16:creationId xmlns:a16="http://schemas.microsoft.com/office/drawing/2014/main" id="{AD7D9675-1906-23D0-6874-5F2A71DB8644}"/>
-              </a:ext>
-            </a:extLst>
-          </p:cNvPr>
-          <p:cNvPicPr>
-            <a:picLocks noChangeAspect="1"/>
-          </p:cNvPicPr>
-          <p:nvPr/>
-        </p:nvPicPr>
-        <p:blipFill>
-          <a:blip r:embed="rId5"/>
-          <a:stretch>
-            <a:fillRect/>
-          </a:stretch>
-        </p:blipFill>
-        <p:spPr>
-          <a:xfrm>
-            <a:off x="8353156" y="5117140"/>
-            <a:ext cx="2133600" cy="1419225"/>
-          </a:xfrm>
-          <a:prstGeom prst="rect">
-            <a:avLst/>
-          </a:prstGeom>
-        </p:spPr>
-      </p:pic>
-      <p:sp>
-        <p:nvSpPr>
-          <p:cNvPr id="15" name="CuadroTexto 14">
-            <a:extLst>
-              <a:ext uri="{FF2B5EF4-FFF2-40B4-BE49-F238E27FC236}">
-                <a16:creationId xmlns:a16="http://schemas.microsoft.com/office/drawing/2014/main" id="{E7D794AF-0637-1602-29B1-72F0FA646B78}"/>
-              </a:ext>
-            </a:extLst>
-          </p:cNvPr>
-          <p:cNvSpPr txBox="1"/>
-          <p:nvPr/>
-        </p:nvSpPr>
-        <p:spPr>
-          <a:xfrm>
-            <a:off x="431887" y="5359057"/>
-            <a:ext cx="7102100" cy="461665"/>
-          </a:xfrm>
-          <a:prstGeom prst="rect">
-            <a:avLst/>
-          </a:prstGeom>
-          <a:noFill/>
-        </p:spPr>
-        <p:txBody>
-          <a:bodyPr wrap="square" rtlCol="0">
-            <a:spAutoFit/>
-          </a:bodyPr>
-          <a:lstStyle/>
-          <a:p>
-            <a:r>
-              <a:rPr lang="es-MX" sz="2400" dirty="0"/>
-              <a:t>Si cambio el </a:t>
-            </a:r>
-            <a:r>
-              <a:rPr lang="es-MX" sz="2400" dirty="0" err="1"/>
-              <a:t>bias</a:t>
-            </a:r>
-            <a:r>
-              <a:rPr lang="es-MX" sz="2400" dirty="0"/>
-              <a:t> por -1.5 podemos computar </a:t>
-            </a:r>
-            <a:r>
-              <a:rPr lang="es-MX" sz="2400" b="1" dirty="0"/>
-              <a:t>and</a:t>
-            </a:r>
-            <a:endParaRPr lang="es-CL" sz="2400" b="1" dirty="0"/>
-          </a:p>
-        </p:txBody>
-      </p:sp>
-    </p:spTree>
-    <p:extLst>
-      <p:ext uri="{BB962C8B-B14F-4D97-AF65-F5344CB8AC3E}">
-        <p14:creationId xmlns:p14="http://schemas.microsoft.com/office/powerpoint/2010/main" val="1356787235"/>
       </p:ext>
     </p:extLst>
   </p:cSld>
@@ -18567,7 +18494,7 @@
           <p:cNvPr id="2" name="Título 1">
             <a:extLst>
               <a:ext uri="{FF2B5EF4-FFF2-40B4-BE49-F238E27FC236}">
-                <a16:creationId xmlns:a16="http://schemas.microsoft.com/office/drawing/2014/main" id="{CDF8F67A-78BD-3A8B-8FFB-3CFFE3E83146}"/>
+                <a16:creationId xmlns:a16="http://schemas.microsoft.com/office/drawing/2014/main" id="{00E9BF25-01FB-48C6-410C-D8C32DF9C761}"/>
               </a:ext>
             </a:extLst>
           </p:cNvPr>
@@ -18629,10 +18556,10 @@
       </p:sp>
       <p:pic>
         <p:nvPicPr>
-          <p:cNvPr id="8" name="Imagen 7" descr="Imagen que contiene Texto&#10;&#10;El contenido generado por IA puede ser incorrecto.">
-            <a:extLst>
-              <a:ext uri="{FF2B5EF4-FFF2-40B4-BE49-F238E27FC236}">
-                <a16:creationId xmlns:a16="http://schemas.microsoft.com/office/drawing/2014/main" id="{DDDDBE43-0617-B654-D686-60A281011650}"/>
+          <p:cNvPr id="8" name="Imagen 7" descr="Interfaz de usuario gráfica, Aplicación&#10;&#10;El contenido generado por IA puede ser incorrecto.">
+            <a:extLst>
+              <a:ext uri="{FF2B5EF4-FFF2-40B4-BE49-F238E27FC236}">
+                <a16:creationId xmlns:a16="http://schemas.microsoft.com/office/drawing/2014/main" id="{EF0E0987-5EBF-664B-6078-6C27B1A3B3F1}"/>
               </a:ext>
             </a:extLst>
           </p:cNvPr>
@@ -18649,8 +18576,8 @@
         </p:blipFill>
         <p:spPr>
           <a:xfrm>
-            <a:off x="1102698" y="1589115"/>
-            <a:ext cx="8021074" cy="1064479"/>
+            <a:off x="431887" y="1856014"/>
+            <a:ext cx="6234494" cy="2362200"/>
           </a:xfrm>
           <a:prstGeom prst="rect">
             <a:avLst/>
@@ -18659,10 +18586,10 @@
       </p:pic>
       <p:pic>
         <p:nvPicPr>
-          <p:cNvPr id="9" name="Imagen 8" descr="Imágenes de Smart Emoji: descubre bancos de fotos, ilustraciones, vectores  y vídeos de 13,428 | Adobe Stock">
-            <a:extLst>
-              <a:ext uri="{FF2B5EF4-FFF2-40B4-BE49-F238E27FC236}">
-                <a16:creationId xmlns:a16="http://schemas.microsoft.com/office/drawing/2014/main" id="{C9918836-F136-D065-BFA2-835370D81EF4}"/>
+          <p:cNvPr id="10" name="Imagen 9" descr="Gráfico&#10;&#10;El contenido generado por IA puede ser incorrecto.">
+            <a:extLst>
+              <a:ext uri="{FF2B5EF4-FFF2-40B4-BE49-F238E27FC236}">
+                <a16:creationId xmlns:a16="http://schemas.microsoft.com/office/drawing/2014/main" id="{29167178-6C40-B4FF-E0D0-2D35424F525D}"/>
               </a:ext>
             </a:extLst>
           </p:cNvPr>
@@ -18679,8 +18606,68 @@
         </p:blipFill>
         <p:spPr>
           <a:xfrm>
-            <a:off x="1266016" y="3818180"/>
-            <a:ext cx="2466975" cy="1847850"/>
+            <a:off x="8562706" y="2055196"/>
+            <a:ext cx="1714500" cy="1466850"/>
+          </a:xfrm>
+          <a:prstGeom prst="rect">
+            <a:avLst/>
+          </a:prstGeom>
+        </p:spPr>
+      </p:pic>
+      <p:pic>
+        <p:nvPicPr>
+          <p:cNvPr id="12" name="Imagen 11">
+            <a:extLst>
+              <a:ext uri="{FF2B5EF4-FFF2-40B4-BE49-F238E27FC236}">
+                <a16:creationId xmlns:a16="http://schemas.microsoft.com/office/drawing/2014/main" id="{7C3BE486-B8A4-2506-22ED-129564C31317}"/>
+              </a:ext>
+            </a:extLst>
+          </p:cNvPr>
+          <p:cNvPicPr>
+            <a:picLocks noChangeAspect="1"/>
+          </p:cNvPicPr>
+          <p:nvPr/>
+        </p:nvPicPr>
+        <p:blipFill>
+          <a:blip r:embed="rId4"/>
+          <a:stretch>
+            <a:fillRect/>
+          </a:stretch>
+        </p:blipFill>
+        <p:spPr>
+          <a:xfrm>
+            <a:off x="8353156" y="3999957"/>
+            <a:ext cx="1924050" cy="428625"/>
+          </a:xfrm>
+          <a:prstGeom prst="rect">
+            <a:avLst/>
+          </a:prstGeom>
+        </p:spPr>
+      </p:pic>
+      <p:pic>
+        <p:nvPicPr>
+          <p:cNvPr id="14" name="Imagen 13" descr="Texto&#10;&#10;El contenido generado por IA puede ser incorrecto.">
+            <a:extLst>
+              <a:ext uri="{FF2B5EF4-FFF2-40B4-BE49-F238E27FC236}">
+                <a16:creationId xmlns:a16="http://schemas.microsoft.com/office/drawing/2014/main" id="{AD7D9675-1906-23D0-6874-5F2A71DB8644}"/>
+              </a:ext>
+            </a:extLst>
+          </p:cNvPr>
+          <p:cNvPicPr>
+            <a:picLocks noChangeAspect="1"/>
+          </p:cNvPicPr>
+          <p:nvPr/>
+        </p:nvPicPr>
+        <p:blipFill>
+          <a:blip r:embed="rId5"/>
+          <a:stretch>
+            <a:fillRect/>
+          </a:stretch>
+        </p:blipFill>
+        <p:spPr>
+          <a:xfrm>
+            <a:off x="8353156" y="5117140"/>
+            <a:ext cx="2133600" cy="1419225"/>
           </a:xfrm>
           <a:prstGeom prst="rect">
             <a:avLst/>
@@ -18689,10 +18676,10 @@
       </p:pic>
       <p:sp>
         <p:nvSpPr>
-          <p:cNvPr id="10" name="CuadroTexto 9">
-            <a:extLst>
-              <a:ext uri="{FF2B5EF4-FFF2-40B4-BE49-F238E27FC236}">
-                <a16:creationId xmlns:a16="http://schemas.microsoft.com/office/drawing/2014/main" id="{01D0F784-6059-B026-100C-AB79A7D0CCB0}"/>
+          <p:cNvPr id="15" name="CuadroTexto 14">
+            <a:extLst>
+              <a:ext uri="{FF2B5EF4-FFF2-40B4-BE49-F238E27FC236}">
+                <a16:creationId xmlns:a16="http://schemas.microsoft.com/office/drawing/2014/main" id="{E7D794AF-0637-1602-29B1-72F0FA646B78}"/>
               </a:ext>
             </a:extLst>
           </p:cNvPr>
@@ -18701,8 +18688,8 @@
         </p:nvSpPr>
         <p:spPr>
           <a:xfrm>
-            <a:off x="5115645" y="3910493"/>
-            <a:ext cx="4937760" cy="523220"/>
+            <a:off x="431887" y="5359057"/>
+            <a:ext cx="7102100" cy="461665"/>
           </a:xfrm>
           <a:prstGeom prst="rect">
             <a:avLst/>
@@ -18716,17 +18703,29 @@
           <a:lstStyle/>
           <a:p>
             <a:r>
-              <a:rPr lang="es-MX" sz="2800" dirty="0"/>
-              <a:t>¿Y qué hago con esto?</a:t>
-            </a:r>
-            <a:endParaRPr lang="es-CL" sz="2800" dirty="0"/>
+              <a:rPr lang="es-MX" sz="2400" dirty="0"/>
+              <a:t>Si cambio el </a:t>
+            </a:r>
+            <a:r>
+              <a:rPr lang="es-MX" sz="2400" dirty="0" err="1"/>
+              <a:t>bias</a:t>
+            </a:r>
+            <a:r>
+              <a:rPr lang="es-MX" sz="2400" dirty="0"/>
+              <a:t> por -1.5 podemos computar </a:t>
+            </a:r>
+            <a:r>
+              <a:rPr lang="es-MX" sz="2400" b="1" dirty="0"/>
+              <a:t>and</a:t>
+            </a:r>
+            <a:endParaRPr lang="es-CL" sz="2400" b="1" dirty="0"/>
           </a:p>
         </p:txBody>
       </p:sp>
     </p:spTree>
     <p:extLst>
       <p:ext uri="{BB962C8B-B14F-4D97-AF65-F5344CB8AC3E}">
-        <p14:creationId xmlns:p14="http://schemas.microsoft.com/office/powerpoint/2010/main" val="1849861055"/>
+        <p14:creationId xmlns:p14="http://schemas.microsoft.com/office/powerpoint/2010/main" val="1356787235"/>
       </p:ext>
     </p:extLst>
   </p:cSld>
@@ -18753,42 +18752,12 @@
           <a:chExt cx="0" cy="0"/>
         </a:xfrm>
       </p:grpSpPr>
-      <p:pic>
-        <p:nvPicPr>
-          <p:cNvPr id="3" name="Imagen 2" descr="Diagrama&#10;&#10;El contenido generado por IA puede ser incorrecto.">
-            <a:extLst>
-              <a:ext uri="{FF2B5EF4-FFF2-40B4-BE49-F238E27FC236}">
-                <a16:creationId xmlns:a16="http://schemas.microsoft.com/office/drawing/2014/main" id="{803ABDE4-E898-B1D2-10FF-E8878FB9FA8D}"/>
-              </a:ext>
-            </a:extLst>
-          </p:cNvPr>
-          <p:cNvPicPr>
-            <a:picLocks noChangeAspect="1"/>
-          </p:cNvPicPr>
-          <p:nvPr/>
-        </p:nvPicPr>
-        <p:blipFill>
-          <a:blip r:embed="rId2"/>
-          <a:stretch>
-            <a:fillRect/>
-          </a:stretch>
-        </p:blipFill>
-        <p:spPr>
-          <a:xfrm>
-            <a:off x="841601" y="1560738"/>
-            <a:ext cx="6100083" cy="4901293"/>
-          </a:xfrm>
-          <a:prstGeom prst="rect">
-            <a:avLst/>
-          </a:prstGeom>
-        </p:spPr>
-      </p:pic>
       <p:sp>
         <p:nvSpPr>
-          <p:cNvPr id="5" name="Título 1">
-            <a:extLst>
-              <a:ext uri="{FF2B5EF4-FFF2-40B4-BE49-F238E27FC236}">
-                <a16:creationId xmlns:a16="http://schemas.microsoft.com/office/drawing/2014/main" id="{B16FC0B2-88C5-1103-131B-35CB30C21966}"/>
+          <p:cNvPr id="2" name="Título 1">
+            <a:extLst>
+              <a:ext uri="{FF2B5EF4-FFF2-40B4-BE49-F238E27FC236}">
+                <a16:creationId xmlns:a16="http://schemas.microsoft.com/office/drawing/2014/main" id="{CDF8F67A-78BD-3A8B-8FFB-3CFFE3E83146}"/>
               </a:ext>
             </a:extLst>
           </p:cNvPr>
@@ -18848,65 +18817,42 @@
           </a:p>
         </p:txBody>
       </p:sp>
-      <p:sp>
-        <p:nvSpPr>
-          <p:cNvPr id="6" name="CuadroTexto 5">
-            <a:extLst>
-              <a:ext uri="{FF2B5EF4-FFF2-40B4-BE49-F238E27FC236}">
-                <a16:creationId xmlns:a16="http://schemas.microsoft.com/office/drawing/2014/main" id="{094355C8-91B4-F6F3-B5DE-C792CC835343}"/>
-              </a:ext>
-            </a:extLst>
-          </p:cNvPr>
-          <p:cNvSpPr txBox="1"/>
-          <p:nvPr/>
-        </p:nvSpPr>
-        <p:spPr>
-          <a:xfrm>
-            <a:off x="7345134" y="1559378"/>
-            <a:ext cx="4014107" cy="2308324"/>
-          </a:xfrm>
-          <a:prstGeom prst="rect">
-            <a:avLst/>
-          </a:prstGeom>
-          <a:noFill/>
-        </p:spPr>
-        <p:txBody>
-          <a:bodyPr rot="0" spcFirstLastPara="0" vertOverflow="overflow" horzOverflow="overflow" vert="horz" wrap="square" lIns="91440" tIns="45720" rIns="91440" bIns="45720" numCol="1" spcCol="0" rtlCol="0" fromWordArt="0" anchor="t" anchorCtr="0" forceAA="0" compatLnSpc="1">
-            <a:prstTxWarp prst="textNoShape">
-              <a:avLst/>
-            </a:prstTxWarp>
-            <a:spAutoFit/>
-          </a:bodyPr>
-          <a:lstStyle/>
-          <a:p>
-            <a:r>
-              <a:rPr lang="es-ES" sz="2400" b="1" dirty="0"/>
-              <a:t>Teorema de aproximación </a:t>
-            </a:r>
-            <a:r>
-              <a:rPr lang="es-ES" sz="2400" b="1"/>
-              <a:t>universal:</a:t>
-            </a:r>
-            <a:endParaRPr lang="es-ES" sz="2400" b="1" dirty="0"/>
-          </a:p>
-          <a:p>
-            <a:endParaRPr lang="es-ES" sz="2400" dirty="0"/>
-          </a:p>
-          <a:p>
-            <a:r>
-              <a:rPr lang="es-ES" sz="2400"/>
-              <a:t>Una red con una capa oculta puede aproximar cualquier función continua. </a:t>
-            </a:r>
-            <a:endParaRPr lang="es-ES" sz="2400" dirty="0"/>
-          </a:p>
-        </p:txBody>
-      </p:sp>
       <p:pic>
         <p:nvPicPr>
-          <p:cNvPr id="7" name="Imagen 6" descr="Imagen que contiene Diagrama&#10;&#10;El contenido generado por IA puede ser incorrecto.">
-            <a:extLst>
-              <a:ext uri="{FF2B5EF4-FFF2-40B4-BE49-F238E27FC236}">
-                <a16:creationId xmlns:a16="http://schemas.microsoft.com/office/drawing/2014/main" id="{978264CF-06FC-412D-1AD0-40B758D2FB3E}"/>
+          <p:cNvPr id="8" name="Imagen 7" descr="Imagen que contiene Texto&#10;&#10;El contenido generado por IA puede ser incorrecto.">
+            <a:extLst>
+              <a:ext uri="{FF2B5EF4-FFF2-40B4-BE49-F238E27FC236}">
+                <a16:creationId xmlns:a16="http://schemas.microsoft.com/office/drawing/2014/main" id="{DDDDBE43-0617-B654-D686-60A281011650}"/>
+              </a:ext>
+            </a:extLst>
+          </p:cNvPr>
+          <p:cNvPicPr>
+            <a:picLocks noChangeAspect="1"/>
+          </p:cNvPicPr>
+          <p:nvPr/>
+        </p:nvPicPr>
+        <p:blipFill>
+          <a:blip r:embed="rId2"/>
+          <a:stretch>
+            <a:fillRect/>
+          </a:stretch>
+        </p:blipFill>
+        <p:spPr>
+          <a:xfrm>
+            <a:off x="1102698" y="1589115"/>
+            <a:ext cx="8021074" cy="1064479"/>
+          </a:xfrm>
+          <a:prstGeom prst="rect">
+            <a:avLst/>
+          </a:prstGeom>
+        </p:spPr>
+      </p:pic>
+      <p:pic>
+        <p:nvPicPr>
+          <p:cNvPr id="9" name="Imagen 8" descr="Imágenes de Smart Emoji: descubre bancos de fotos, ilustraciones, vectores  y vídeos de 13,428 | Adobe Stock">
+            <a:extLst>
+              <a:ext uri="{FF2B5EF4-FFF2-40B4-BE49-F238E27FC236}">
+                <a16:creationId xmlns:a16="http://schemas.microsoft.com/office/drawing/2014/main" id="{C9918836-F136-D065-BFA2-835370D81EF4}"/>
               </a:ext>
             </a:extLst>
           </p:cNvPr>
@@ -18923,129 +18869,60 @@
         </p:blipFill>
         <p:spPr>
           <a:xfrm>
-            <a:off x="7770360" y="4605338"/>
-            <a:ext cx="3160939" cy="782410"/>
+            <a:off x="1266016" y="3818180"/>
+            <a:ext cx="2466975" cy="1847850"/>
           </a:xfrm>
           <a:prstGeom prst="rect">
             <a:avLst/>
           </a:prstGeom>
         </p:spPr>
       </p:pic>
+      <p:sp>
+        <p:nvSpPr>
+          <p:cNvPr id="10" name="CuadroTexto 9">
+            <a:extLst>
+              <a:ext uri="{FF2B5EF4-FFF2-40B4-BE49-F238E27FC236}">
+                <a16:creationId xmlns:a16="http://schemas.microsoft.com/office/drawing/2014/main" id="{01D0F784-6059-B026-100C-AB79A7D0CCB0}"/>
+              </a:ext>
+            </a:extLst>
+          </p:cNvPr>
+          <p:cNvSpPr txBox="1"/>
+          <p:nvPr/>
+        </p:nvSpPr>
+        <p:spPr>
+          <a:xfrm>
+            <a:off x="5115645" y="3910493"/>
+            <a:ext cx="4937760" cy="523220"/>
+          </a:xfrm>
+          <a:prstGeom prst="rect">
+            <a:avLst/>
+          </a:prstGeom>
+          <a:noFill/>
+        </p:spPr>
+        <p:txBody>
+          <a:bodyPr wrap="square" rtlCol="0">
+            <a:spAutoFit/>
+          </a:bodyPr>
+          <a:lstStyle/>
+          <a:p>
+            <a:r>
+              <a:rPr lang="es-MX" sz="2800" dirty="0"/>
+              <a:t>¿Y qué hago con esto?</a:t>
+            </a:r>
+            <a:endParaRPr lang="es-CL" sz="2800" dirty="0"/>
+          </a:p>
+        </p:txBody>
+      </p:sp>
     </p:spTree>
     <p:extLst>
       <p:ext uri="{BB962C8B-B14F-4D97-AF65-F5344CB8AC3E}">
-        <p14:creationId xmlns:p14="http://schemas.microsoft.com/office/powerpoint/2010/main" val="3568050433"/>
+        <p14:creationId xmlns:p14="http://schemas.microsoft.com/office/powerpoint/2010/main" val="1849861055"/>
       </p:ext>
     </p:extLst>
   </p:cSld>
   <p:clrMapOvr>
     <a:masterClrMapping/>
   </p:clrMapOvr>
-  <p:timing>
-    <p:tnLst>
-      <p:par>
-        <p:cTn id="1" dur="indefinite" restart="never" nodeType="tmRoot">
-          <p:childTnLst>
-            <p:seq concurrent="1" nextAc="seek">
-              <p:cTn id="2" dur="indefinite" nodeType="mainSeq">
-                <p:childTnLst>
-                  <p:par>
-                    <p:cTn id="3" fill="hold">
-                      <p:stCondLst>
-                        <p:cond delay="indefinite"/>
-                      </p:stCondLst>
-                      <p:childTnLst>
-                        <p:par>
-                          <p:cTn id="4" fill="hold">
-                            <p:stCondLst>
-                              <p:cond delay="0"/>
-                            </p:stCondLst>
-                            <p:childTnLst>
-                              <p:par>
-                                <p:cTn id="5" presetID="1" presetClass="entr" presetSubtype="0" fill="hold" grpId="0" nodeType="clickEffect">
-                                  <p:stCondLst>
-                                    <p:cond delay="0"/>
-                                  </p:stCondLst>
-                                  <p:childTnLst>
-                                    <p:set>
-                                      <p:cBhvr>
-                                        <p:cTn id="6" dur="1" fill="hold">
-                                          <p:stCondLst>
-                                            <p:cond delay="0"/>
-                                          </p:stCondLst>
-                                        </p:cTn>
-                                        <p:tgtEl>
-                                          <p:spTgt spid="6"/>
-                                        </p:tgtEl>
-                                        <p:attrNameLst>
-                                          <p:attrName>style.visibility</p:attrName>
-                                        </p:attrNameLst>
-                                      </p:cBhvr>
-                                      <p:to>
-                                        <p:strVal val="visible"/>
-                                      </p:to>
-                                    </p:set>
-                                  </p:childTnLst>
-                                </p:cTn>
-                              </p:par>
-                              <p:par>
-                                <p:cTn id="7" presetID="1" presetClass="entr" presetSubtype="0" fill="hold" nodeType="withEffect">
-                                  <p:stCondLst>
-                                    <p:cond delay="0"/>
-                                  </p:stCondLst>
-                                  <p:childTnLst>
-                                    <p:set>
-                                      <p:cBhvr>
-                                        <p:cTn id="8" dur="1" fill="hold">
-                                          <p:stCondLst>
-                                            <p:cond delay="0"/>
-                                          </p:stCondLst>
-                                        </p:cTn>
-                                        <p:tgtEl>
-                                          <p:spTgt spid="7"/>
-                                        </p:tgtEl>
-                                        <p:attrNameLst>
-                                          <p:attrName>style.visibility</p:attrName>
-                                        </p:attrNameLst>
-                                      </p:cBhvr>
-                                      <p:to>
-                                        <p:strVal val="visible"/>
-                                      </p:to>
-                                    </p:set>
-                                  </p:childTnLst>
-                                </p:cTn>
-                              </p:par>
-                            </p:childTnLst>
-                          </p:cTn>
-                        </p:par>
-                      </p:childTnLst>
-                    </p:cTn>
-                  </p:par>
-                </p:childTnLst>
-              </p:cTn>
-              <p:prevCondLst>
-                <p:cond evt="onPrev" delay="0">
-                  <p:tgtEl>
-                    <p:sldTgt/>
-                  </p:tgtEl>
-                </p:cond>
-              </p:prevCondLst>
-              <p:nextCondLst>
-                <p:cond evt="onNext" delay="0">
-                  <p:tgtEl>
-                    <p:sldTgt/>
-                  </p:tgtEl>
-                </p:cond>
-              </p:nextCondLst>
-            </p:seq>
-          </p:childTnLst>
-        </p:cTn>
-      </p:par>
-    </p:tnLst>
-    <p:bldLst>
-      <p:bldP spid="6" grpId="0"/>
-    </p:bldLst>
-  </p:timing>
 </p:sld>
 </file>
 
@@ -19321,12 +19198,42 @@
           <a:chExt cx="0" cy="0"/>
         </a:xfrm>
       </p:grpSpPr>
+      <p:pic>
+        <p:nvPicPr>
+          <p:cNvPr id="3" name="Imagen 2" descr="Diagrama&#10;&#10;El contenido generado por IA puede ser incorrecto.">
+            <a:extLst>
+              <a:ext uri="{FF2B5EF4-FFF2-40B4-BE49-F238E27FC236}">
+                <a16:creationId xmlns:a16="http://schemas.microsoft.com/office/drawing/2014/main" id="{803ABDE4-E898-B1D2-10FF-E8878FB9FA8D}"/>
+              </a:ext>
+            </a:extLst>
+          </p:cNvPr>
+          <p:cNvPicPr>
+            <a:picLocks noChangeAspect="1"/>
+          </p:cNvPicPr>
+          <p:nvPr/>
+        </p:nvPicPr>
+        <p:blipFill>
+          <a:blip r:embed="rId2"/>
+          <a:stretch>
+            <a:fillRect/>
+          </a:stretch>
+        </p:blipFill>
+        <p:spPr>
+          <a:xfrm>
+            <a:off x="841601" y="1560738"/>
+            <a:ext cx="6100083" cy="4901293"/>
+          </a:xfrm>
+          <a:prstGeom prst="rect">
+            <a:avLst/>
+          </a:prstGeom>
+        </p:spPr>
+      </p:pic>
       <p:sp>
         <p:nvSpPr>
-          <p:cNvPr id="2" name="Título 1">
-            <a:extLst>
-              <a:ext uri="{FF2B5EF4-FFF2-40B4-BE49-F238E27FC236}">
-                <a16:creationId xmlns:a16="http://schemas.microsoft.com/office/drawing/2014/main" id="{650750E6-A054-16E0-66C1-D5887F8B95CA}"/>
+          <p:cNvPr id="5" name="Título 1">
+            <a:extLst>
+              <a:ext uri="{FF2B5EF4-FFF2-40B4-BE49-F238E27FC236}">
+                <a16:creationId xmlns:a16="http://schemas.microsoft.com/office/drawing/2014/main" id="{B16FC0B2-88C5-1103-131B-35CB30C21966}"/>
               </a:ext>
             </a:extLst>
           </p:cNvPr>
@@ -19386,6 +19293,289 @@
           </a:p>
         </p:txBody>
       </p:sp>
+      <p:sp>
+        <p:nvSpPr>
+          <p:cNvPr id="6" name="CuadroTexto 5">
+            <a:extLst>
+              <a:ext uri="{FF2B5EF4-FFF2-40B4-BE49-F238E27FC236}">
+                <a16:creationId xmlns:a16="http://schemas.microsoft.com/office/drawing/2014/main" id="{094355C8-91B4-F6F3-B5DE-C792CC835343}"/>
+              </a:ext>
+            </a:extLst>
+          </p:cNvPr>
+          <p:cNvSpPr txBox="1"/>
+          <p:nvPr/>
+        </p:nvSpPr>
+        <p:spPr>
+          <a:xfrm>
+            <a:off x="7345134" y="1559378"/>
+            <a:ext cx="4014107" cy="2308324"/>
+          </a:xfrm>
+          <a:prstGeom prst="rect">
+            <a:avLst/>
+          </a:prstGeom>
+          <a:noFill/>
+        </p:spPr>
+        <p:txBody>
+          <a:bodyPr rot="0" spcFirstLastPara="0" vertOverflow="overflow" horzOverflow="overflow" vert="horz" wrap="square" lIns="91440" tIns="45720" rIns="91440" bIns="45720" numCol="1" spcCol="0" rtlCol="0" fromWordArt="0" anchor="t" anchorCtr="0" forceAA="0" compatLnSpc="1">
+            <a:prstTxWarp prst="textNoShape">
+              <a:avLst/>
+            </a:prstTxWarp>
+            <a:spAutoFit/>
+          </a:bodyPr>
+          <a:lstStyle/>
+          <a:p>
+            <a:r>
+              <a:rPr lang="es-ES" sz="2400" b="1" dirty="0"/>
+              <a:t>Teorema de aproximación </a:t>
+            </a:r>
+            <a:r>
+              <a:rPr lang="es-ES" sz="2400" b="1"/>
+              <a:t>universal:</a:t>
+            </a:r>
+            <a:endParaRPr lang="es-ES" sz="2400" b="1" dirty="0"/>
+          </a:p>
+          <a:p>
+            <a:endParaRPr lang="es-ES" sz="2400" dirty="0"/>
+          </a:p>
+          <a:p>
+            <a:r>
+              <a:rPr lang="es-ES" sz="2400"/>
+              <a:t>Una red con una capa oculta puede aproximar cualquier función continua. </a:t>
+            </a:r>
+            <a:endParaRPr lang="es-ES" sz="2400" dirty="0"/>
+          </a:p>
+        </p:txBody>
+      </p:sp>
+      <p:pic>
+        <p:nvPicPr>
+          <p:cNvPr id="7" name="Imagen 6" descr="Imagen que contiene Diagrama&#10;&#10;El contenido generado por IA puede ser incorrecto.">
+            <a:extLst>
+              <a:ext uri="{FF2B5EF4-FFF2-40B4-BE49-F238E27FC236}">
+                <a16:creationId xmlns:a16="http://schemas.microsoft.com/office/drawing/2014/main" id="{978264CF-06FC-412D-1AD0-40B758D2FB3E}"/>
+              </a:ext>
+            </a:extLst>
+          </p:cNvPr>
+          <p:cNvPicPr>
+            <a:picLocks noChangeAspect="1"/>
+          </p:cNvPicPr>
+          <p:nvPr/>
+        </p:nvPicPr>
+        <p:blipFill>
+          <a:blip r:embed="rId3"/>
+          <a:stretch>
+            <a:fillRect/>
+          </a:stretch>
+        </p:blipFill>
+        <p:spPr>
+          <a:xfrm>
+            <a:off x="7770360" y="4605338"/>
+            <a:ext cx="3160939" cy="782410"/>
+          </a:xfrm>
+          <a:prstGeom prst="rect">
+            <a:avLst/>
+          </a:prstGeom>
+        </p:spPr>
+      </p:pic>
+    </p:spTree>
+    <p:extLst>
+      <p:ext uri="{BB962C8B-B14F-4D97-AF65-F5344CB8AC3E}">
+        <p14:creationId xmlns:p14="http://schemas.microsoft.com/office/powerpoint/2010/main" val="3568050433"/>
+      </p:ext>
+    </p:extLst>
+  </p:cSld>
+  <p:clrMapOvr>
+    <a:masterClrMapping/>
+  </p:clrMapOvr>
+  <p:timing>
+    <p:tnLst>
+      <p:par>
+        <p:cTn id="1" dur="indefinite" restart="never" nodeType="tmRoot">
+          <p:childTnLst>
+            <p:seq concurrent="1" nextAc="seek">
+              <p:cTn id="2" dur="indefinite" nodeType="mainSeq">
+                <p:childTnLst>
+                  <p:par>
+                    <p:cTn id="3" fill="hold">
+                      <p:stCondLst>
+                        <p:cond delay="indefinite"/>
+                      </p:stCondLst>
+                      <p:childTnLst>
+                        <p:par>
+                          <p:cTn id="4" fill="hold">
+                            <p:stCondLst>
+                              <p:cond delay="0"/>
+                            </p:stCondLst>
+                            <p:childTnLst>
+                              <p:par>
+                                <p:cTn id="5" presetID="1" presetClass="entr" presetSubtype="0" fill="hold" grpId="0" nodeType="clickEffect">
+                                  <p:stCondLst>
+                                    <p:cond delay="0"/>
+                                  </p:stCondLst>
+                                  <p:childTnLst>
+                                    <p:set>
+                                      <p:cBhvr>
+                                        <p:cTn id="6" dur="1" fill="hold">
+                                          <p:stCondLst>
+                                            <p:cond delay="0"/>
+                                          </p:stCondLst>
+                                        </p:cTn>
+                                        <p:tgtEl>
+                                          <p:spTgt spid="6"/>
+                                        </p:tgtEl>
+                                        <p:attrNameLst>
+                                          <p:attrName>style.visibility</p:attrName>
+                                        </p:attrNameLst>
+                                      </p:cBhvr>
+                                      <p:to>
+                                        <p:strVal val="visible"/>
+                                      </p:to>
+                                    </p:set>
+                                  </p:childTnLst>
+                                </p:cTn>
+                              </p:par>
+                              <p:par>
+                                <p:cTn id="7" presetID="1" presetClass="entr" presetSubtype="0" fill="hold" nodeType="withEffect">
+                                  <p:stCondLst>
+                                    <p:cond delay="0"/>
+                                  </p:stCondLst>
+                                  <p:childTnLst>
+                                    <p:set>
+                                      <p:cBhvr>
+                                        <p:cTn id="8" dur="1" fill="hold">
+                                          <p:stCondLst>
+                                            <p:cond delay="0"/>
+                                          </p:stCondLst>
+                                        </p:cTn>
+                                        <p:tgtEl>
+                                          <p:spTgt spid="7"/>
+                                        </p:tgtEl>
+                                        <p:attrNameLst>
+                                          <p:attrName>style.visibility</p:attrName>
+                                        </p:attrNameLst>
+                                      </p:cBhvr>
+                                      <p:to>
+                                        <p:strVal val="visible"/>
+                                      </p:to>
+                                    </p:set>
+                                  </p:childTnLst>
+                                </p:cTn>
+                              </p:par>
+                            </p:childTnLst>
+                          </p:cTn>
+                        </p:par>
+                      </p:childTnLst>
+                    </p:cTn>
+                  </p:par>
+                </p:childTnLst>
+              </p:cTn>
+              <p:prevCondLst>
+                <p:cond evt="onPrev" delay="0">
+                  <p:tgtEl>
+                    <p:sldTgt/>
+                  </p:tgtEl>
+                </p:cond>
+              </p:prevCondLst>
+              <p:nextCondLst>
+                <p:cond evt="onNext" delay="0">
+                  <p:tgtEl>
+                    <p:sldTgt/>
+                  </p:tgtEl>
+                </p:cond>
+              </p:nextCondLst>
+            </p:seq>
+          </p:childTnLst>
+        </p:cTn>
+      </p:par>
+    </p:tnLst>
+    <p:bldLst>
+      <p:bldP spid="6" grpId="0"/>
+    </p:bldLst>
+  </p:timing>
+</p:sld>
+</file>
+
+<file path=ppt/slides/slide31.xml><?xml version="1.0" encoding="utf-8"?>
+<p:sld xmlns:a="http://schemas.openxmlformats.org/drawingml/2006/main" xmlns:r="http://schemas.openxmlformats.org/officeDocument/2006/relationships" xmlns:p="http://schemas.openxmlformats.org/presentationml/2006/main">
+  <p:cSld>
+    <p:spTree>
+      <p:nvGrpSpPr>
+        <p:cNvPr id="1" name=""/>
+        <p:cNvGrpSpPr/>
+        <p:nvPr/>
+      </p:nvGrpSpPr>
+      <p:grpSpPr>
+        <a:xfrm>
+          <a:off x="0" y="0"/>
+          <a:ext cx="0" cy="0"/>
+          <a:chOff x="0" y="0"/>
+          <a:chExt cx="0" cy="0"/>
+        </a:xfrm>
+      </p:grpSpPr>
+      <p:sp>
+        <p:nvSpPr>
+          <p:cNvPr id="2" name="Título 1">
+            <a:extLst>
+              <a:ext uri="{FF2B5EF4-FFF2-40B4-BE49-F238E27FC236}">
+                <a16:creationId xmlns:a16="http://schemas.microsoft.com/office/drawing/2014/main" id="{650750E6-A054-16E0-66C1-D5887F8B95CA}"/>
+              </a:ext>
+            </a:extLst>
+          </p:cNvPr>
+          <p:cNvSpPr txBox="1">
+            <a:spLocks/>
+          </p:cNvSpPr>
+          <p:nvPr/>
+        </p:nvSpPr>
+        <p:spPr>
+          <a:xfrm>
+            <a:off x="1266016" y="211771"/>
+            <a:ext cx="8080788" cy="1064480"/>
+          </a:xfrm>
+          <a:prstGeom prst="rect">
+            <a:avLst/>
+          </a:prstGeom>
+          <a:ln>
+            <a:noFill/>
+          </a:ln>
+        </p:spPr>
+        <p:txBody>
+          <a:bodyPr lIns="91440" tIns="45720" rIns="91440" bIns="45720" anchor="t"/>
+          <a:lstStyle>
+            <a:lvl1pPr algn="l" defTabSz="914400" rtl="0" eaLnBrk="1" latinLnBrk="0" hangingPunct="1">
+              <a:lnSpc>
+                <a:spcPct val="90000"/>
+              </a:lnSpc>
+              <a:spcBef>
+                <a:spcPct val="0"/>
+              </a:spcBef>
+              <a:buNone/>
+              <a:defRPr sz="4400" kern="1200">
+                <a:solidFill>
+                  <a:schemeClr val="tx1"/>
+                </a:solidFill>
+                <a:latin typeface="+mj-lt"/>
+                <a:ea typeface="+mj-ea"/>
+                <a:cs typeface="+mj-cs"/>
+              </a:defRPr>
+            </a:lvl1pPr>
+          </a:lstStyle>
+          <a:p>
+            <a:pPr>
+              <a:lnSpc>
+                <a:spcPts val="3800"/>
+              </a:lnSpc>
+            </a:pPr>
+            <a:r>
+              <a:rPr lang="es-CL" sz="4000" dirty="0">
+                <a:solidFill>
+                  <a:schemeClr val="bg1"/>
+                </a:solidFill>
+              </a:rPr>
+              <a:t>Una breve historia</a:t>
+            </a:r>
+            <a:endParaRPr lang="es-ES" dirty="0"/>
+          </a:p>
+        </p:txBody>
+      </p:sp>
       <p:pic>
         <p:nvPicPr>
           <p:cNvPr id="3074" name="Picture 2" descr="Artificial Neural Network Architecture">
@@ -19446,7 +19636,7 @@
 </p:sld>
 </file>
 
-<file path=ppt/slides/slide31.xml><?xml version="1.0" encoding="utf-8"?>
+<file path=ppt/slides/slide32.xml><?xml version="1.0" encoding="utf-8"?>
 <p:sld xmlns:a="http://schemas.openxmlformats.org/drawingml/2006/main" xmlns:r="http://schemas.openxmlformats.org/officeDocument/2006/relationships" xmlns:p="http://schemas.openxmlformats.org/presentationml/2006/main">
   <p:cSld>
     <p:spTree>
@@ -20640,7 +20830,7 @@
 </p:sld>
 </file>
 
-<file path=ppt/slides/slide32.xml><?xml version="1.0" encoding="utf-8"?>
+<file path=ppt/slides/slide33.xml><?xml version="1.0" encoding="utf-8"?>
 <p:sld xmlns:a="http://schemas.openxmlformats.org/drawingml/2006/main" xmlns:r="http://schemas.openxmlformats.org/officeDocument/2006/relationships" xmlns:p="http://schemas.openxmlformats.org/presentationml/2006/main">
   <p:cSld>
     <p:spTree>
@@ -20940,7 +21130,7 @@
 </p:sld>
 </file>
 
-<file path=ppt/slides/slide33.xml><?xml version="1.0" encoding="utf-8"?>
+<file path=ppt/slides/slide34.xml><?xml version="1.0" encoding="utf-8"?>
 <p:sld xmlns:a="http://schemas.openxmlformats.org/drawingml/2006/main" xmlns:r="http://schemas.openxmlformats.org/officeDocument/2006/relationships" xmlns:p="http://schemas.openxmlformats.org/presentationml/2006/main">
   <p:cSld>
     <p:spTree>
@@ -21176,7 +21366,7 @@
 </p:sld>
 </file>
 
-<file path=ppt/slides/slide34.xml><?xml version="1.0" encoding="utf-8"?>
+<file path=ppt/slides/slide35.xml><?xml version="1.0" encoding="utf-8"?>
 <p:sld xmlns:a="http://schemas.openxmlformats.org/drawingml/2006/main" xmlns:r="http://schemas.openxmlformats.org/officeDocument/2006/relationships" xmlns:p="http://schemas.openxmlformats.org/presentationml/2006/main">
   <p:cSld>
     <p:spTree>
@@ -21523,7 +21713,7 @@
 </p:sld>
 </file>
 
-<file path=ppt/slides/slide35.xml><?xml version="1.0" encoding="utf-8"?>
+<file path=ppt/slides/slide36.xml><?xml version="1.0" encoding="utf-8"?>
 <p:sld xmlns:a="http://schemas.openxmlformats.org/drawingml/2006/main" xmlns:r="http://schemas.openxmlformats.org/officeDocument/2006/relationships" xmlns:p="http://schemas.openxmlformats.org/presentationml/2006/main">
   <p:cSld>
     <p:spTree>
@@ -21848,7 +22038,7 @@
 </p:sld>
 </file>
 
-<file path=ppt/slides/slide36.xml><?xml version="1.0" encoding="utf-8"?>
+<file path=ppt/slides/slide37.xml><?xml version="1.0" encoding="utf-8"?>
 <p:sld xmlns:a="http://schemas.openxmlformats.org/drawingml/2006/main" xmlns:r="http://schemas.openxmlformats.org/officeDocument/2006/relationships" xmlns:p="http://schemas.openxmlformats.org/presentationml/2006/main">
   <p:cSld>
     <p:spTree>
@@ -23042,7 +23232,7 @@
 </p:sld>
 </file>
 
-<file path=ppt/slides/slide37.xml><?xml version="1.0" encoding="utf-8"?>
+<file path=ppt/slides/slide38.xml><?xml version="1.0" encoding="utf-8"?>
 <p:sld xmlns:a="http://schemas.openxmlformats.org/drawingml/2006/main" xmlns:r="http://schemas.openxmlformats.org/officeDocument/2006/relationships" xmlns:p="http://schemas.openxmlformats.org/presentationml/2006/main">
   <p:cSld>
     <p:spTree>
@@ -23555,7 +23745,7 @@
 </p:sld>
 </file>
 
-<file path=ppt/slides/slide38.xml><?xml version="1.0" encoding="utf-8"?>
+<file path=ppt/slides/slide39.xml><?xml version="1.0" encoding="utf-8"?>
 <p:sld xmlns:a="http://schemas.openxmlformats.org/drawingml/2006/main" xmlns:r="http://schemas.openxmlformats.org/officeDocument/2006/relationships" xmlns:p="http://schemas.openxmlformats.org/presentationml/2006/main">
   <p:cSld>
     <p:spTree>
@@ -23827,7 +24017,117 @@
 </p:sld>
 </file>
 
-<file path=ppt/slides/slide39.xml><?xml version="1.0" encoding="utf-8"?>
+<file path=ppt/slides/slide4.xml><?xml version="1.0" encoding="utf-8"?>
+<p:sld xmlns:a="http://schemas.openxmlformats.org/drawingml/2006/main" xmlns:r="http://schemas.openxmlformats.org/officeDocument/2006/relationships" xmlns:p="http://schemas.openxmlformats.org/presentationml/2006/main">
+  <p:cSld>
+    <p:spTree>
+      <p:nvGrpSpPr>
+        <p:cNvPr id="1" name=""/>
+        <p:cNvGrpSpPr/>
+        <p:nvPr/>
+      </p:nvGrpSpPr>
+      <p:grpSpPr>
+        <a:xfrm>
+          <a:off x="0" y="0"/>
+          <a:ext cx="0" cy="0"/>
+          <a:chOff x="0" y="0"/>
+          <a:chExt cx="0" cy="0"/>
+        </a:xfrm>
+      </p:grpSpPr>
+      <p:sp>
+        <p:nvSpPr>
+          <p:cNvPr id="2" name="CuadroTexto 1">
+            <a:extLst>
+              <a:ext uri="{FF2B5EF4-FFF2-40B4-BE49-F238E27FC236}">
+                <a16:creationId xmlns:a16="http://schemas.microsoft.com/office/drawing/2014/main" id="{7E19CD43-47BC-7E60-F59E-E4822FDC314D}"/>
+              </a:ext>
+            </a:extLst>
+          </p:cNvPr>
+          <p:cNvSpPr txBox="1"/>
+          <p:nvPr/>
+        </p:nvSpPr>
+        <p:spPr>
+          <a:xfrm>
+            <a:off x="2828942" y="4123805"/>
+            <a:ext cx="6712857" cy="954107"/>
+          </a:xfrm>
+          <a:prstGeom prst="rect">
+            <a:avLst/>
+          </a:prstGeom>
+          <a:noFill/>
+        </p:spPr>
+        <p:txBody>
+          <a:bodyPr rot="0" spcFirstLastPara="0" vertOverflow="overflow" horzOverflow="overflow" vert="horz" wrap="square" lIns="91440" tIns="45720" rIns="91440" bIns="45720" numCol="1" spcCol="0" rtlCol="0" fromWordArt="0" anchor="t" anchorCtr="0" forceAA="0" compatLnSpc="1">
+            <a:prstTxWarp prst="textNoShape">
+              <a:avLst/>
+            </a:prstTxWarp>
+            <a:spAutoFit/>
+          </a:bodyPr>
+          <a:lstStyle/>
+          <a:p>
+            <a:r>
+              <a:rPr lang="en-US" sz="2800"/>
+              <a:t>https://www.menti.com/alhmaao7w5o9</a:t>
+            </a:r>
+          </a:p>
+          <a:p>
+            <a:pPr algn="ctr"/>
+            <a:endParaRPr lang="es-ES" sz="2800"/>
+          </a:p>
+        </p:txBody>
+      </p:sp>
+      <p:sp>
+        <p:nvSpPr>
+          <p:cNvPr id="4" name="CuadroTexto 3">
+            <a:extLst>
+              <a:ext uri="{FF2B5EF4-FFF2-40B4-BE49-F238E27FC236}">
+                <a16:creationId xmlns:a16="http://schemas.microsoft.com/office/drawing/2014/main" id="{94998A34-364A-3E0F-92F5-C4EA21CEE685}"/>
+              </a:ext>
+            </a:extLst>
+          </p:cNvPr>
+          <p:cNvSpPr txBox="1"/>
+          <p:nvPr/>
+        </p:nvSpPr>
+        <p:spPr>
+          <a:xfrm>
+            <a:off x="3548439" y="2258785"/>
+            <a:ext cx="6354535" cy="584775"/>
+          </a:xfrm>
+          <a:prstGeom prst="rect">
+            <a:avLst/>
+          </a:prstGeom>
+          <a:noFill/>
+        </p:spPr>
+        <p:txBody>
+          <a:bodyPr rot="0" spcFirstLastPara="0" vertOverflow="overflow" horzOverflow="overflow" vert="horz" wrap="square" lIns="91440" tIns="45720" rIns="91440" bIns="45720" numCol="1" spcCol="0" rtlCol="0" fromWordArt="0" anchor="t" anchorCtr="0" forceAA="0" compatLnSpc="1">
+            <a:prstTxWarp prst="textNoShape">
+              <a:avLst/>
+            </a:prstTxWarp>
+            <a:spAutoFit/>
+          </a:bodyPr>
+          <a:lstStyle/>
+          <a:p>
+            <a:r>
+              <a:rPr lang="es-ES" sz="3200" b="1"/>
+              <a:t>Intentaremos otra cosa</a:t>
+            </a:r>
+          </a:p>
+        </p:txBody>
+      </p:sp>
+    </p:spTree>
+    <p:extLst>
+      <p:ext uri="{BB962C8B-B14F-4D97-AF65-F5344CB8AC3E}">
+        <p14:creationId xmlns:p14="http://schemas.microsoft.com/office/powerpoint/2010/main" val="1978502702"/>
+      </p:ext>
+    </p:extLst>
+  </p:cSld>
+  <p:clrMapOvr>
+    <a:masterClrMapping/>
+  </p:clrMapOvr>
+</p:sld>
+</file>
+
+<file path=ppt/slides/slide40.xml><?xml version="1.0" encoding="utf-8"?>
 <p:sld xmlns:a="http://schemas.openxmlformats.org/drawingml/2006/main" xmlns:r="http://schemas.openxmlformats.org/officeDocument/2006/relationships" xmlns:p="http://schemas.openxmlformats.org/presentationml/2006/main">
   <p:cSld>
     <p:spTree>
@@ -24092,117 +24392,7 @@
 </p:sld>
 </file>
 
-<file path=ppt/slides/slide4.xml><?xml version="1.0" encoding="utf-8"?>
-<p:sld xmlns:a="http://schemas.openxmlformats.org/drawingml/2006/main" xmlns:r="http://schemas.openxmlformats.org/officeDocument/2006/relationships" xmlns:p="http://schemas.openxmlformats.org/presentationml/2006/main">
-  <p:cSld>
-    <p:spTree>
-      <p:nvGrpSpPr>
-        <p:cNvPr id="1" name=""/>
-        <p:cNvGrpSpPr/>
-        <p:nvPr/>
-      </p:nvGrpSpPr>
-      <p:grpSpPr>
-        <a:xfrm>
-          <a:off x="0" y="0"/>
-          <a:ext cx="0" cy="0"/>
-          <a:chOff x="0" y="0"/>
-          <a:chExt cx="0" cy="0"/>
-        </a:xfrm>
-      </p:grpSpPr>
-      <p:sp>
-        <p:nvSpPr>
-          <p:cNvPr id="2" name="CuadroTexto 1">
-            <a:extLst>
-              <a:ext uri="{FF2B5EF4-FFF2-40B4-BE49-F238E27FC236}">
-                <a16:creationId xmlns:a16="http://schemas.microsoft.com/office/drawing/2014/main" id="{7E19CD43-47BC-7E60-F59E-E4822FDC314D}"/>
-              </a:ext>
-            </a:extLst>
-          </p:cNvPr>
-          <p:cNvSpPr txBox="1"/>
-          <p:nvPr/>
-        </p:nvSpPr>
-        <p:spPr>
-          <a:xfrm>
-            <a:off x="2828942" y="4123805"/>
-            <a:ext cx="6712857" cy="954107"/>
-          </a:xfrm>
-          <a:prstGeom prst="rect">
-            <a:avLst/>
-          </a:prstGeom>
-          <a:noFill/>
-        </p:spPr>
-        <p:txBody>
-          <a:bodyPr rot="0" spcFirstLastPara="0" vertOverflow="overflow" horzOverflow="overflow" vert="horz" wrap="square" lIns="91440" tIns="45720" rIns="91440" bIns="45720" numCol="1" spcCol="0" rtlCol="0" fromWordArt="0" anchor="t" anchorCtr="0" forceAA="0" compatLnSpc="1">
-            <a:prstTxWarp prst="textNoShape">
-              <a:avLst/>
-            </a:prstTxWarp>
-            <a:spAutoFit/>
-          </a:bodyPr>
-          <a:lstStyle/>
-          <a:p>
-            <a:r>
-              <a:rPr lang="en-US" sz="2800"/>
-              <a:t>https://www.menti.com/alhmaao7w5o9</a:t>
-            </a:r>
-          </a:p>
-          <a:p>
-            <a:pPr algn="ctr"/>
-            <a:endParaRPr lang="es-ES" sz="2800"/>
-          </a:p>
-        </p:txBody>
-      </p:sp>
-      <p:sp>
-        <p:nvSpPr>
-          <p:cNvPr id="4" name="CuadroTexto 3">
-            <a:extLst>
-              <a:ext uri="{FF2B5EF4-FFF2-40B4-BE49-F238E27FC236}">
-                <a16:creationId xmlns:a16="http://schemas.microsoft.com/office/drawing/2014/main" id="{94998A34-364A-3E0F-92F5-C4EA21CEE685}"/>
-              </a:ext>
-            </a:extLst>
-          </p:cNvPr>
-          <p:cNvSpPr txBox="1"/>
-          <p:nvPr/>
-        </p:nvSpPr>
-        <p:spPr>
-          <a:xfrm>
-            <a:off x="3548439" y="2258785"/>
-            <a:ext cx="6354535" cy="584775"/>
-          </a:xfrm>
-          <a:prstGeom prst="rect">
-            <a:avLst/>
-          </a:prstGeom>
-          <a:noFill/>
-        </p:spPr>
-        <p:txBody>
-          <a:bodyPr rot="0" spcFirstLastPara="0" vertOverflow="overflow" horzOverflow="overflow" vert="horz" wrap="square" lIns="91440" tIns="45720" rIns="91440" bIns="45720" numCol="1" spcCol="0" rtlCol="0" fromWordArt="0" anchor="t" anchorCtr="0" forceAA="0" compatLnSpc="1">
-            <a:prstTxWarp prst="textNoShape">
-              <a:avLst/>
-            </a:prstTxWarp>
-            <a:spAutoFit/>
-          </a:bodyPr>
-          <a:lstStyle/>
-          <a:p>
-            <a:r>
-              <a:rPr lang="es-ES" sz="3200" b="1"/>
-              <a:t>Intentaremos otra cosa</a:t>
-            </a:r>
-          </a:p>
-        </p:txBody>
-      </p:sp>
-    </p:spTree>
-    <p:extLst>
-      <p:ext uri="{BB962C8B-B14F-4D97-AF65-F5344CB8AC3E}">
-        <p14:creationId xmlns:p14="http://schemas.microsoft.com/office/powerpoint/2010/main" val="1978502702"/>
-      </p:ext>
-    </p:extLst>
-  </p:cSld>
-  <p:clrMapOvr>
-    <a:masterClrMapping/>
-  </p:clrMapOvr>
-</p:sld>
-</file>
-
-<file path=ppt/slides/slide40.xml><?xml version="1.0" encoding="utf-8"?>
+<file path=ppt/slides/slide41.xml><?xml version="1.0" encoding="utf-8"?>
 <p:sld xmlns:a="http://schemas.openxmlformats.org/drawingml/2006/main" xmlns:r="http://schemas.openxmlformats.org/officeDocument/2006/relationships" xmlns:p="http://schemas.openxmlformats.org/presentationml/2006/main">
   <p:cSld>
     <p:spTree>
@@ -26747,6 +26937,26 @@
 </file>
 
 <file path=customXml/item1.xml><?xml version="1.0" encoding="utf-8"?>
+<?mso-contentType ?>
+<FormTemplates xmlns="http://schemas.microsoft.com/sharepoint/v3/contenttype/forms">
+  <Display>DocumentLibraryForm</Display>
+  <Edit>DocumentLibraryForm</Edit>
+  <New>DocumentLibraryForm</New>
+</FormTemplates>
+</file>
+
+<file path=customXml/item2.xml><?xml version="1.0" encoding="utf-8"?>
+<p:properties xmlns:p="http://schemas.microsoft.com/office/2006/metadata/properties" xmlns:xsi="http://www.w3.org/2001/XMLSchema-instance" xmlns:pc="http://schemas.microsoft.com/office/infopath/2007/PartnerControls">
+  <documentManagement>
+    <TaxCatchAll xmlns="eb2afa6a-810f-4ed7-8f21-327af999a369" xsi:nil="true"/>
+    <lcf76f155ced4ddcb4097134ff3c332f xmlns="e64bf764-2ba8-4e7e-8540-1bb999ea21ad">
+      <Terms xmlns="http://schemas.microsoft.com/office/infopath/2007/PartnerControls"/>
+    </lcf76f155ced4ddcb4097134ff3c332f>
+  </documentManagement>
+</p:properties>
+</file>
+
+<file path=customXml/item3.xml><?xml version="1.0" encoding="utf-8"?>
 <ct:contentTypeSchema xmlns:ct="http://schemas.microsoft.com/office/2006/metadata/contentType" xmlns:ma="http://schemas.microsoft.com/office/2006/metadata/properties/metaAttributes" ct:_="" ma:_="" ma:contentTypeName="Documento" ma:contentTypeID="0x010100569638AAC56BFC4F90416B7A96E38619" ma:contentTypeVersion="15" ma:contentTypeDescription="Crear nuevo documento." ma:contentTypeScope="" ma:versionID="9f267c0f90450f545b7d81d591b5982c">
   <xsd:schema xmlns:xsd="http://www.w3.org/2001/XMLSchema" xmlns:xs="http://www.w3.org/2001/XMLSchema" xmlns:p="http://schemas.microsoft.com/office/2006/metadata/properties" xmlns:ns2="e64bf764-2ba8-4e7e-8540-1bb999ea21ad" xmlns:ns3="eb2afa6a-810f-4ed7-8f21-327af999a369" targetNamespace="http://schemas.microsoft.com/office/2006/metadata/properties" ma:root="true" ma:fieldsID="155a20082e4561ae1a0921467fc6838f" ns2:_="" ns3:_="">
     <xsd:import namespace="e64bf764-2ba8-4e7e-8540-1bb999ea21ad"/>
@@ -26981,27 +27191,32 @@
 </ct:contentTypeSchema>
 </file>
 
-<file path=customXml/item2.xml><?xml version="1.0" encoding="utf-8"?>
-<?mso-contentType ?>
-<FormTemplates xmlns="http://schemas.microsoft.com/sharepoint/v3/contenttype/forms">
-  <Display>DocumentLibraryForm</Display>
-  <Edit>DocumentLibraryForm</Edit>
-  <New>DocumentLibraryForm</New>
-</FormTemplates>
+<file path=customXml/itemProps1.xml><?xml version="1.0" encoding="utf-8"?>
+<ds:datastoreItem xmlns:ds="http://schemas.openxmlformats.org/officeDocument/2006/customXml" ds:itemID="{360CF6E8-67F3-4AC0-953A-B6798DAE124A}">
+  <ds:schemaRefs>
+    <ds:schemaRef ds:uri="http://schemas.microsoft.com/sharepoint/v3/contenttype/forms"/>
+  </ds:schemaRefs>
+</ds:datastoreItem>
 </file>
 
-<file path=customXml/item3.xml><?xml version="1.0" encoding="utf-8"?>
-<p:properties xmlns:p="http://schemas.microsoft.com/office/2006/metadata/properties" xmlns:xsi="http://www.w3.org/2001/XMLSchema-instance" xmlns:pc="http://schemas.microsoft.com/office/infopath/2007/PartnerControls">
-  <documentManagement>
-    <TaxCatchAll xmlns="eb2afa6a-810f-4ed7-8f21-327af999a369" xsi:nil="true"/>
-    <lcf76f155ced4ddcb4097134ff3c332f xmlns="e64bf764-2ba8-4e7e-8540-1bb999ea21ad">
-      <Terms xmlns="http://schemas.microsoft.com/office/infopath/2007/PartnerControls"/>
-    </lcf76f155ced4ddcb4097134ff3c332f>
-  </documentManagement>
-</p:properties>
+<file path=customXml/itemProps2.xml><?xml version="1.0" encoding="utf-8"?>
+<ds:datastoreItem xmlns:ds="http://schemas.openxmlformats.org/officeDocument/2006/customXml" ds:itemID="{FFFB15F4-32AA-4E2B-AC84-118D5E771FB8}">
+  <ds:schemaRefs>
+    <ds:schemaRef ds:uri="http://www.w3.org/XML/1998/namespace"/>
+    <ds:schemaRef ds:uri="http://purl.org/dc/terms/"/>
+    <ds:schemaRef ds:uri="eb2afa6a-810f-4ed7-8f21-327af999a369"/>
+    <ds:schemaRef ds:uri="http://schemas.microsoft.com/office/2006/documentManagement/types"/>
+    <ds:schemaRef ds:uri="http://purl.org/dc/elements/1.1/"/>
+    <ds:schemaRef ds:uri="http://schemas.microsoft.com/office/2006/metadata/properties"/>
+    <ds:schemaRef ds:uri="http://purl.org/dc/dcmitype/"/>
+    <ds:schemaRef ds:uri="http://schemas.microsoft.com/office/infopath/2007/PartnerControls"/>
+    <ds:schemaRef ds:uri="http://schemas.openxmlformats.org/package/2006/metadata/core-properties"/>
+    <ds:schemaRef ds:uri="e64bf764-2ba8-4e7e-8540-1bb999ea21ad"/>
+  </ds:schemaRefs>
+</ds:datastoreItem>
 </file>
 
-<file path=customXml/itemProps1.xml><?xml version="1.0" encoding="utf-8"?>
+<file path=customXml/itemProps3.xml><?xml version="1.0" encoding="utf-8"?>
 <ds:datastoreItem xmlns:ds="http://schemas.openxmlformats.org/officeDocument/2006/customXml" ds:itemID="{995947FF-8323-4F32-922D-66B9818D9C3F}">
   <ds:schemaRefs>
     <ds:schemaRef ds:uri="e64bf764-2ba8-4e7e-8540-1bb999ea21ad"/>
@@ -27018,29 +27233,4 @@
     <ds:schemaRef ds:uri="http://www.w3.org/2001/XMLSchema"/>
   </ds:schemaRefs>
 </ds:datastoreItem>
-</file>
-
-<file path=customXml/itemProps2.xml><?xml version="1.0" encoding="utf-8"?>
-<ds:datastoreItem xmlns:ds="http://schemas.openxmlformats.org/officeDocument/2006/customXml" ds:itemID="{360CF6E8-67F3-4AC0-953A-B6798DAE124A}">
-  <ds:schemaRefs>
-    <ds:schemaRef ds:uri="http://schemas.microsoft.com/sharepoint/v3/contenttype/forms"/>
-  </ds:schemaRefs>
-</ds:datastoreItem>
-</file>
-
-<file path=customXml/itemProps3.xml><?xml version="1.0" encoding="utf-8"?>
-<ds:datastoreItem xmlns:ds="http://schemas.openxmlformats.org/officeDocument/2006/customXml" ds:itemID="{FFFB15F4-32AA-4E2B-AC84-118D5E771FB8}">
-  <ds:schemaRefs>
-    <ds:schemaRef ds:uri="http://www.w3.org/XML/1998/namespace"/>
-    <ds:schemaRef ds:uri="http://purl.org/dc/terms/"/>
-    <ds:schemaRef ds:uri="eb2afa6a-810f-4ed7-8f21-327af999a369"/>
-    <ds:schemaRef ds:uri="http://schemas.microsoft.com/office/2006/documentManagement/types"/>
-    <ds:schemaRef ds:uri="http://purl.org/dc/elements/1.1/"/>
-    <ds:schemaRef ds:uri="http://schemas.microsoft.com/office/2006/metadata/properties"/>
-    <ds:schemaRef ds:uri="http://purl.org/dc/dcmitype/"/>
-    <ds:schemaRef ds:uri="http://schemas.microsoft.com/office/infopath/2007/PartnerControls"/>
-    <ds:schemaRef ds:uri="http://schemas.openxmlformats.org/package/2006/metadata/core-properties"/>
-    <ds:schemaRef ds:uri="e64bf764-2ba8-4e7e-8540-1bb999ea21ad"/>
-  </ds:schemaRefs>
-</ds:datastoreItem>
 </file>